--- a/exports/pptx/lessons/primary-module-01-what-is-iks/day-10-show-and-tell.pptx
+++ b/exports/pptx/lessons/primary-module-01-what-is-iks/day-10-show-and-tell.pptx
@@ -12,9 +12,10 @@
     <p:sldId id="260" r:id="rId6"/>
     <p:sldId id="261" r:id="rId7"/>
     <p:sldId id="262" r:id="rId8"/>
+    <p:sldId id="263" r:id="rId9"/>
   </p:sldIdLst>
   <p:notesMasterIdLst>
-    <p:notesMasterId r:id="rId9"/>
+    <p:notesMasterId r:id="rId10"/>
   </p:notesMasterIdLst>
   <p:sldSz cx="9144000" cy="5143500"/>
   <p:notesSz cx="5143500" cy="9144000"/>
@@ -1060,6 +1061,94 @@
             <a:fld id="{F7021451-1387-4CA6-816F-3879F97B5CBC}" type="slidenum">
               <a:rPr lang="en-US"/>
               <a:t>7</a:t>
+            </a:fld>
+            <a:endParaRPr lang="en-US"/>
+          </a:p>
+        </p:txBody>
+      </p:sp>
+    </p:spTree>
+    <p:extLst>
+      <p:ext uri="{BB962C8B-B14F-4D97-AF65-F5344CB8AC3E}">
+        <p14:creationId xmlns:p14="http://schemas.microsoft.com/office/powerpoint/2010/main" val="1024086991"/>
+      </p:ext>
+    </p:extLst>
+  </p:cSld>
+  <p:clrMapOvr>
+    <a:masterClrMapping/>
+  </p:clrMapOvr>
+</p:notes>
+</file>
+
+<file path=ppt/notesSlides/notesSlide8.xml><?xml version="1.0" encoding="utf-8"?>
+<p:notes xmlns:a="http://schemas.openxmlformats.org/drawingml/2006/main" xmlns:r="http://schemas.openxmlformats.org/officeDocument/2006/relationships" xmlns:p="http://schemas.openxmlformats.org/presentationml/2006/main">
+  <p:cSld>
+    <p:spTree>
+      <p:nvGrpSpPr>
+        <p:cNvPr id="1" name=""/>
+        <p:cNvGrpSpPr/>
+        <p:nvPr/>
+      </p:nvGrpSpPr>
+      <p:grpSpPr>
+        <a:xfrm>
+          <a:off x="0" y="0"/>
+          <a:ext cx="0" cy="0"/>
+          <a:chOff x="0" y="0"/>
+          <a:chExt cx="0" cy="0"/>
+        </a:xfrm>
+      </p:grpSpPr>
+      <p:sp>
+        <p:nvSpPr>
+          <p:cNvPr id="2" name="Slide Image Placeholder 1"/>
+          <p:cNvSpPr>
+            <a:spLocks noGrp="1" noRot="1" noChangeAspect="1"/>
+          </p:cNvSpPr>
+          <p:nvPr>
+            <p:ph type="sldImg"/>
+          </p:nvPr>
+        </p:nvSpPr>
+        <p:spPr/>
+      </p:sp>
+      <p:sp>
+        <p:nvSpPr>
+          <p:cNvPr id="3" name="Notes Placeholder 2"/>
+          <p:cNvSpPr>
+            <a:spLocks noGrp="1"/>
+          </p:cNvSpPr>
+          <p:nvPr>
+            <p:ph type="body" idx="1"/>
+          </p:nvPr>
+        </p:nvSpPr>
+        <p:spPr/>
+        <p:txBody>
+          <a:bodyPr/>
+          <a:lstStyle/>
+          <a:p>
+            <a:r>
+              <a:rPr lang="en-US" dirty="0"/>
+              <a:t/>
+            </a:r>
+            <a:endParaRPr lang="en-US" dirty="0"/>
+          </a:p>
+        </p:txBody>
+      </p:sp>
+      <p:sp>
+        <p:nvSpPr>
+          <p:cNvPr id="4" name="Slide Number Placeholder 3"/>
+          <p:cNvSpPr>
+            <a:spLocks noGrp="1"/>
+          </p:cNvSpPr>
+          <p:nvPr>
+            <p:ph type="sldNum" sz="quarter" idx="10"/>
+          </p:nvPr>
+        </p:nvSpPr>
+        <p:spPr/>
+        <p:txBody>
+          <a:bodyPr/>
+          <a:lstStyle/>
+          <a:p>
+            <a:fld id="{F7021451-1387-4CA6-816F-3879F97B5CBC}" type="slidenum">
+              <a:rPr lang="en-US"/>
+              <a:t>8</a:t>
             </a:fld>
             <a:endParaRPr lang="en-US"/>
           </a:p>
@@ -1609,102 +1698,6 @@
         </p:nvSpPr>
         <p:spPr>
           <a:xfrm>
-            <a:off x="406301" y="1223963"/>
-            <a:ext cx="8498026" cy="274290"/>
-          </a:xfrm>
-          <a:prstGeom prst="rect">
-            <a:avLst/>
-          </a:prstGeom>
-          <a:noFill/>
-          <a:ln/>
-        </p:spPr>
-        <p:txBody>
-          <a:bodyPr wrap="square" lIns="0" tIns="0" rIns="0" bIns="0" rtlCol="0" anchor="t"/>
-          <a:lstStyle/>
-          <a:p>
-            <a:pPr algn="l" indent="0" marL="0">
-              <a:lnSpc>
-                <a:spcPts val="2160"/>
-              </a:lnSpc>
-              <a:spcBef>
-                <a:spcPts val="600"/>
-              </a:spcBef>
-              <a:spcAft>
-                <a:spcPts val="800"/>
-              </a:spcAft>
-              <a:buNone/>
-            </a:pPr>
-            <a:r>
-              <a:rPr lang="en-US" sz="1800" b="1" dirty="0">
-                <a:solidFill>
-                  <a:srgbClr val="E07A5F"/>
-                </a:solidFill>
-                <a:latin typeface="Georgia" pitchFamily="34" charset="0"/>
-                <a:ea typeface="Georgia" pitchFamily="34" charset="-122"/>
-                <a:cs typeface="Georgia" pitchFamily="34" charset="-120"/>
-              </a:rPr>
-              <a:t>Goal</a:t>
-            </a:r>
-            <a:endParaRPr lang="en-US" sz="1800" dirty="0"/>
-          </a:p>
-        </p:txBody>
-      </p:sp>
-      <p:sp>
-        <p:nvSpPr>
-          <p:cNvPr id="6" name="Text 4"/>
-          <p:cNvSpPr/>
-          <p:nvPr/>
-        </p:nvSpPr>
-        <p:spPr>
-          <a:xfrm>
-            <a:off x="406301" y="1637854"/>
-            <a:ext cx="8498026" cy="213271"/>
-          </a:xfrm>
-          <a:prstGeom prst="rect">
-            <a:avLst/>
-          </a:prstGeom>
-          <a:noFill/>
-          <a:ln/>
-        </p:spPr>
-        <p:txBody>
-          <a:bodyPr wrap="square" lIns="0" tIns="0" rIns="0" bIns="0" rtlCol="0" anchor="t"/>
-          <a:lstStyle/>
-          <a:p>
-            <a:pPr algn="l" indent="0" marL="0">
-              <a:lnSpc>
-                <a:spcPts val="1680"/>
-              </a:lnSpc>
-              <a:spcBef>
-                <a:spcPts val="300"/>
-              </a:spcBef>
-              <a:spcAft>
-                <a:spcPts val="300"/>
-              </a:spcAft>
-              <a:buNone/>
-            </a:pPr>
-            <a:r>
-              <a:rPr lang="en-US" sz="1200" dirty="0">
-                <a:solidFill>
-                  <a:srgbClr val="2C2C2C"/>
-                </a:solidFill>
-                <a:latin typeface="Verdana" pitchFamily="34" charset="0"/>
-                <a:ea typeface="Verdana" pitchFamily="34" charset="-122"/>
-                <a:cs typeface="Verdana" pitchFamily="34" charset="-120"/>
-              </a:rPr>
-              <a:t>Each child shares their gift project for 30 seconds. Sticker for all.</a:t>
-            </a:r>
-            <a:endParaRPr lang="en-US" sz="1200" dirty="0"/>
-          </a:p>
-        </p:txBody>
-      </p:sp>
-      <p:sp>
-        <p:nvSpPr>
-          <p:cNvPr id="7" name="Text 5"/>
-          <p:cNvSpPr/>
-          <p:nvPr/>
-        </p:nvSpPr>
-        <p:spPr>
-          <a:xfrm>
             <a:off x="406301" y="4434929"/>
             <a:ext cx="8498026" cy="213271"/>
           </a:xfrm>
@@ -1849,7 +1842,7 @@
                 <a:ea typeface="Georgia" pitchFamily="34" charset="-122"/>
                 <a:cs typeface="Georgia" pitchFamily="34" charset="-120"/>
               </a:rPr>
-              <a:t>Materials</a:t>
+              <a:t>Goal</a:t>
             </a:r>
             <a:endParaRPr lang="en-US" sz="1800" dirty="0"/>
           </a:p>
@@ -1897,7 +1890,7 @@
                 <a:ea typeface="Verdana" pitchFamily="34" charset="-122"/>
                 <a:cs typeface="Verdana" pitchFamily="34" charset="-120"/>
               </a:rPr>
-              <a:t>– Children's projects – Stickers – Chime for timing</a:t>
+              <a:t>Each child shares their gift project for 30 seconds. Sticker for all.</a:t>
             </a:r>
             <a:endParaRPr lang="en-US" sz="1200" dirty="0"/>
           </a:p>
@@ -2055,7 +2048,7 @@
                 <a:ea typeface="Georgia" pitchFamily="34" charset="-122"/>
                 <a:cs typeface="Georgia" pitchFamily="34" charset="-120"/>
               </a:rPr>
-              <a:t>Flow</a:t>
+              <a:t>Materials</a:t>
             </a:r>
             <a:endParaRPr lang="en-US" sz="1800" dirty="0"/>
           </a:p>
@@ -2064,6 +2057,100 @@
       <p:sp>
         <p:nvSpPr>
           <p:cNvPr id="4" name="Text 2"/>
+          <p:cNvSpPr/>
+          <p:nvPr/>
+        </p:nvSpPr>
+        <p:spPr>
+          <a:xfrm>
+            <a:off x="634901" y="883593"/>
+            <a:ext cx="8102798" cy="769441"/>
+          </a:xfrm>
+          <a:prstGeom prst="rect">
+            <a:avLst/>
+          </a:prstGeom>
+          <a:noFill/>
+          <a:ln/>
+        </p:spPr>
+        <p:txBody>
+          <a:bodyPr wrap="square" lIns="0" tIns="0" rIns="0" bIns="0" rtlCol="0" anchor="t"/>
+          <a:lstStyle/>
+          <a:p>
+            <a:pPr algn="l" marL="342900" indent="-342900">
+              <a:lnSpc>
+                <a:spcPts val="1620"/>
+              </a:lnSpc>
+              <a:spcAft>
+                <a:spcPts val="300"/>
+              </a:spcAft>
+              <a:buSzPct val="100000"/>
+              <a:buChar char="•"/>
+            </a:pPr>
+            <a:r>
+              <a:rPr lang="en-US" sz="1200" dirty="0">
+                <a:solidFill>
+                  <a:srgbClr val="2C2C2C"/>
+                </a:solidFill>
+                <a:latin typeface="Verdana" pitchFamily="34" charset="0"/>
+                <a:ea typeface="Verdana" pitchFamily="34" charset="-122"/>
+                <a:cs typeface="Verdana" pitchFamily="34" charset="-120"/>
+              </a:rPr>
+              <a:t>Children's projects</a:t>
+            </a:r>
+            <a:endParaRPr lang="en-US" sz="1200" dirty="0"/>
+          </a:p>
+          <a:p>
+            <a:pPr algn="l" marL="342900" indent="-342900">
+              <a:lnSpc>
+                <a:spcPts val="1620"/>
+              </a:lnSpc>
+              <a:spcAft>
+                <a:spcPts val="300"/>
+              </a:spcAft>
+              <a:buSzPct val="100000"/>
+              <a:buChar char="•"/>
+            </a:pPr>
+            <a:r>
+              <a:rPr lang="en-US" sz="1200" dirty="0">
+                <a:solidFill>
+                  <a:srgbClr val="2C2C2C"/>
+                </a:solidFill>
+                <a:latin typeface="Verdana" pitchFamily="34" charset="0"/>
+                <a:ea typeface="Verdana" pitchFamily="34" charset="-122"/>
+                <a:cs typeface="Verdana" pitchFamily="34" charset="-120"/>
+              </a:rPr>
+              <a:t>Stickers</a:t>
+            </a:r>
+            <a:endParaRPr lang="en-US" sz="1200" dirty="0"/>
+          </a:p>
+          <a:p>
+            <a:pPr algn="l" marL="342900" indent="-342900">
+              <a:lnSpc>
+                <a:spcPts val="1620"/>
+              </a:lnSpc>
+              <a:spcAft>
+                <a:spcPts val="300"/>
+              </a:spcAft>
+              <a:buSzPct val="100000"/>
+              <a:buChar char="•"/>
+            </a:pPr>
+            <a:r>
+              <a:rPr lang="en-US" sz="1200" dirty="0">
+                <a:solidFill>
+                  <a:srgbClr val="2C2C2C"/>
+                </a:solidFill>
+                <a:latin typeface="Verdana" pitchFamily="34" charset="0"/>
+                <a:ea typeface="Verdana" pitchFamily="34" charset="-122"/>
+                <a:cs typeface="Verdana" pitchFamily="34" charset="-120"/>
+              </a:rPr>
+              <a:t>Chime for timing</a:t>
+            </a:r>
+            <a:endParaRPr lang="en-US" sz="1200" dirty="0"/>
+          </a:p>
+        </p:txBody>
+      </p:sp>
+      <p:sp>
+        <p:nvSpPr>
+          <p:cNvPr id="5" name="Text 3"/>
           <p:cNvSpPr/>
           <p:nvPr/>
         </p:nvSpPr>
@@ -2213,7 +2300,7 @@
                 <a:ea typeface="Georgia" pitchFamily="34" charset="-122"/>
                 <a:cs typeface="Georgia" pitchFamily="34" charset="-120"/>
               </a:rPr>
-              <a:t>Settle + chant + song (5 min)</a:t>
+              <a:t>Flow</a:t>
             </a:r>
             <a:endParaRPr lang="en-US" sz="1800" dirty="0"/>
           </a:p>
@@ -2222,54 +2309,6 @@
       <p:sp>
         <p:nvSpPr>
           <p:cNvPr id="4" name="Text 2"/>
-          <p:cNvSpPr/>
-          <p:nvPr/>
-        </p:nvSpPr>
-        <p:spPr>
-          <a:xfrm>
-            <a:off x="406301" y="870942"/>
-            <a:ext cx="8498026" cy="213271"/>
-          </a:xfrm>
-          <a:prstGeom prst="rect">
-            <a:avLst/>
-          </a:prstGeom>
-          <a:noFill/>
-          <a:ln/>
-        </p:spPr>
-        <p:txBody>
-          <a:bodyPr wrap="square" lIns="0" tIns="0" rIns="0" bIns="0" rtlCol="0" anchor="t"/>
-          <a:lstStyle/>
-          <a:p>
-            <a:pPr algn="l" indent="0" marL="0">
-              <a:lnSpc>
-                <a:spcPts val="1680"/>
-              </a:lnSpc>
-              <a:spcBef>
-                <a:spcPts val="300"/>
-              </a:spcBef>
-              <a:spcAft>
-                <a:spcPts val="300"/>
-              </a:spcAft>
-              <a:buNone/>
-            </a:pPr>
-            <a:r>
-              <a:rPr lang="en-US" sz="1200" dirty="0">
-                <a:solidFill>
-                  <a:srgbClr val="2C2C2C"/>
-                </a:solidFill>
-                <a:latin typeface="Verdana" pitchFamily="34" charset="0"/>
-                <a:ea typeface="Verdana" pitchFamily="34" charset="-122"/>
-                <a:cs typeface="Verdana" pitchFamily="34" charset="-120"/>
-              </a:rPr>
-              <a:t>Biggest chant yet!</a:t>
-            </a:r>
-            <a:endParaRPr lang="en-US" sz="1200" dirty="0"/>
-          </a:p>
-        </p:txBody>
-      </p:sp>
-      <p:sp>
-        <p:nvSpPr>
-          <p:cNvPr id="5" name="Text 3"/>
           <p:cNvSpPr/>
           <p:nvPr/>
         </p:nvSpPr>
@@ -2419,7 +2458,7 @@
                 <a:ea typeface="Georgia" pitchFamily="34" charset="-122"/>
                 <a:cs typeface="Georgia" pitchFamily="34" charset="-120"/>
               </a:rPr>
-              <a:t>Show &amp; Tell (22 min)</a:t>
+              <a:t>Settle + chant + song (5 min)</a:t>
             </a:r>
             <a:endParaRPr lang="en-US" sz="1800" dirty="0"/>
           </a:p>
@@ -2434,7 +2473,7 @@
         <p:spPr>
           <a:xfrm>
             <a:off x="406301" y="870942"/>
-            <a:ext cx="8498026" cy="426541"/>
+            <a:ext cx="8498026" cy="213271"/>
           </a:xfrm>
           <a:prstGeom prst="rect">
             <a:avLst/>
@@ -2467,7 +2506,7 @@
                 <a:ea typeface="Verdana" pitchFamily="34" charset="-122"/>
                 <a:cs typeface="Verdana" pitchFamily="34" charset="-120"/>
               </a:rPr>
-              <a:t>– 1 child at a time. 30 seconds. Chime. – Each child:   1. Names their gift.   2. Shows project.   3. One sentence: why they picked it.</a:t>
+              <a:t>Biggest chant yet!</a:t>
             </a:r>
             <a:endParaRPr lang="en-US" sz="1200" dirty="0"/>
           </a:p>
@@ -2476,54 +2515,6 @@
       <p:sp>
         <p:nvSpPr>
           <p:cNvPr id="5" name="Text 3"/>
-          <p:cNvSpPr/>
-          <p:nvPr/>
-        </p:nvSpPr>
-        <p:spPr>
-          <a:xfrm>
-            <a:off x="406301" y="1373684"/>
-            <a:ext cx="8498026" cy="213271"/>
-          </a:xfrm>
-          <a:prstGeom prst="rect">
-            <a:avLst/>
-          </a:prstGeom>
-          <a:noFill/>
-          <a:ln/>
-        </p:spPr>
-        <p:txBody>
-          <a:bodyPr wrap="square" lIns="0" tIns="0" rIns="0" bIns="0" rtlCol="0" anchor="t"/>
-          <a:lstStyle/>
-          <a:p>
-            <a:pPr algn="l" indent="0" marL="0">
-              <a:lnSpc>
-                <a:spcPts val="1680"/>
-              </a:lnSpc>
-              <a:spcBef>
-                <a:spcPts val="300"/>
-              </a:spcBef>
-              <a:spcAft>
-                <a:spcPts val="300"/>
-              </a:spcAft>
-              <a:buNone/>
-            </a:pPr>
-            <a:r>
-              <a:rPr lang="en-US" sz="1200" dirty="0">
-                <a:solidFill>
-                  <a:srgbClr val="2C2C2C"/>
-                </a:solidFill>
-                <a:latin typeface="Verdana" pitchFamily="34" charset="0"/>
-                <a:ea typeface="Verdana" pitchFamily="34" charset="-122"/>
-                <a:cs typeface="Verdana" pitchFamily="34" charset="-120"/>
-              </a:rPr>
-              <a:t>Class claps. Sticker.</a:t>
-            </a:r>
-            <a:endParaRPr lang="en-US" sz="1200" dirty="0"/>
-          </a:p>
-        </p:txBody>
-      </p:sp>
-      <p:sp>
-        <p:nvSpPr>
-          <p:cNvPr id="6" name="Text 4"/>
           <p:cNvSpPr/>
           <p:nvPr/>
         </p:nvSpPr>
@@ -2673,7 +2664,7 @@
                 <a:ea typeface="Georgia" pitchFamily="34" charset="-122"/>
                 <a:cs typeface="Georgia" pitchFamily="34" charset="-120"/>
               </a:rPr>
-              <a:t>Closing (3 min)</a:t>
+              <a:t>Show &amp; Tell (22 min)</a:t>
             </a:r>
             <a:endParaRPr lang="en-US" sz="1800" dirty="0"/>
           </a:p>
@@ -2687,8 +2678,8 @@
         </p:nvSpPr>
         <p:spPr>
           <a:xfrm>
-            <a:off x="406301" y="870942"/>
-            <a:ext cx="8498026" cy="213271"/>
+            <a:off x="634901" y="883593"/>
+            <a:ext cx="8102798" cy="1257002"/>
           </a:xfrm>
           <a:prstGeom prst="rect">
             <a:avLst/>
@@ -2700,17 +2691,15 @@
           <a:bodyPr wrap="square" lIns="0" tIns="0" rIns="0" bIns="0" rtlCol="0" anchor="t"/>
           <a:lstStyle/>
           <a:p>
-            <a:pPr algn="l" indent="0" marL="0">
+            <a:pPr algn="l" marL="342900" indent="-342900">
               <a:lnSpc>
-                <a:spcPts val="1680"/>
+                <a:spcPts val="1620"/>
               </a:lnSpc>
-              <a:spcBef>
-                <a:spcPts val="300"/>
-              </a:spcBef>
               <a:spcAft>
                 <a:spcPts val="300"/>
               </a:spcAft>
-              <a:buNone/>
+              <a:buSzPct val="100000"/>
+              <a:buChar char="•"/>
             </a:pPr>
             <a:r>
               <a:rPr lang="en-US" sz="1200" dirty="0">
@@ -2721,32 +2710,10 @@
                 <a:ea typeface="Verdana" pitchFamily="34" charset="-122"/>
                 <a:cs typeface="Verdana" pitchFamily="34" charset="-120"/>
               </a:rPr>
-              <a:t>– Stand in a circle. – Sing the song one final time.</a:t>
+              <a:t>1 child at a time. 30 seconds. Chime.</a:t>
             </a:r>
             <a:endParaRPr lang="en-US" sz="1200" dirty="0"/>
           </a:p>
-        </p:txBody>
-      </p:sp>
-      <p:sp>
-        <p:nvSpPr>
-          <p:cNvPr id="5" name="Text 3"/>
-          <p:cNvSpPr/>
-          <p:nvPr/>
-        </p:nvSpPr>
-        <p:spPr>
-          <a:xfrm>
-            <a:off x="634901" y="1173063"/>
-            <a:ext cx="8102798" cy="281880"/>
-          </a:xfrm>
-          <a:prstGeom prst="rect">
-            <a:avLst/>
-          </a:prstGeom>
-          <a:noFill/>
-          <a:ln/>
-        </p:spPr>
-        <p:txBody>
-          <a:bodyPr wrap="square" lIns="0" tIns="0" rIns="0" bIns="0" rtlCol="0" anchor="t"/>
-          <a:lstStyle/>
           <a:p>
             <a:pPr algn="l" marL="342900" indent="-342900">
               <a:lnSpc>
@@ -2759,7 +2726,7 @@
               <a:buChar char="•"/>
             </a:pPr>
             <a:r>
-              <a:rPr lang="en-US" sz="1200" i="1" dirty="0">
+              <a:rPr lang="en-US" sz="1200" dirty="0">
                 <a:solidFill>
                   <a:srgbClr val="2C2C2C"/>
                 </a:solidFill>
@@ -2767,7 +2734,127 @@
                 <a:ea typeface="Verdana" pitchFamily="34" charset="-122"/>
                 <a:cs typeface="Verdana" pitchFamily="34" charset="-120"/>
               </a:rPr>
-              <a:t>"You all know the five gifts. They're with you for life."</a:t>
+              <a:t>Each child:</a:t>
+            </a:r>
+            <a:endParaRPr lang="en-US" sz="1200" dirty="0"/>
+          </a:p>
+          <a:p>
+            <a:pPr algn="l" marL="342900" indent="-342900">
+              <a:lnSpc>
+                <a:spcPts val="1620"/>
+              </a:lnSpc>
+              <a:spcAft>
+                <a:spcPts val="300"/>
+              </a:spcAft>
+              <a:buSzPct val="100000"/>
+              <a:buChar char="•"/>
+            </a:pPr>
+            <a:r>
+              <a:rPr lang="en-US" sz="1200" dirty="0">
+                <a:solidFill>
+                  <a:srgbClr val="2C2C2C"/>
+                </a:solidFill>
+                <a:latin typeface="Verdana" pitchFamily="34" charset="0"/>
+                <a:ea typeface="Verdana" pitchFamily="34" charset="-122"/>
+                <a:cs typeface="Verdana" pitchFamily="34" charset="-120"/>
+              </a:rPr>
+              <a:t>Names their gift.</a:t>
+            </a:r>
+            <a:endParaRPr lang="en-US" sz="1200" dirty="0"/>
+          </a:p>
+          <a:p>
+            <a:pPr algn="l" marL="342900" indent="-342900">
+              <a:lnSpc>
+                <a:spcPts val="1620"/>
+              </a:lnSpc>
+              <a:spcAft>
+                <a:spcPts val="300"/>
+              </a:spcAft>
+              <a:buSzPct val="100000"/>
+              <a:buChar char="•"/>
+            </a:pPr>
+            <a:r>
+              <a:rPr lang="en-US" sz="1200" dirty="0">
+                <a:solidFill>
+                  <a:srgbClr val="2C2C2C"/>
+                </a:solidFill>
+                <a:latin typeface="Verdana" pitchFamily="34" charset="0"/>
+                <a:ea typeface="Verdana" pitchFamily="34" charset="-122"/>
+                <a:cs typeface="Verdana" pitchFamily="34" charset="-120"/>
+              </a:rPr>
+              <a:t>Shows project.</a:t>
+            </a:r>
+            <a:endParaRPr lang="en-US" sz="1200" dirty="0"/>
+          </a:p>
+          <a:p>
+            <a:pPr algn="l" marL="342900" indent="-342900">
+              <a:lnSpc>
+                <a:spcPts val="1620"/>
+              </a:lnSpc>
+              <a:spcAft>
+                <a:spcPts val="300"/>
+              </a:spcAft>
+              <a:buSzPct val="100000"/>
+              <a:buChar char="•"/>
+            </a:pPr>
+            <a:r>
+              <a:rPr lang="en-US" sz="1200" dirty="0">
+                <a:solidFill>
+                  <a:srgbClr val="2C2C2C"/>
+                </a:solidFill>
+                <a:latin typeface="Verdana" pitchFamily="34" charset="0"/>
+                <a:ea typeface="Verdana" pitchFamily="34" charset="-122"/>
+                <a:cs typeface="Verdana" pitchFamily="34" charset="-120"/>
+              </a:rPr>
+              <a:t>One sentence: why they picked it.</a:t>
+            </a:r>
+            <a:endParaRPr lang="en-US" sz="1200" dirty="0"/>
+          </a:p>
+        </p:txBody>
+      </p:sp>
+      <p:sp>
+        <p:nvSpPr>
+          <p:cNvPr id="5" name="Text 3"/>
+          <p:cNvSpPr/>
+          <p:nvPr/>
+        </p:nvSpPr>
+        <p:spPr>
+          <a:xfrm>
+            <a:off x="406301" y="2229445"/>
+            <a:ext cx="8498026" cy="213271"/>
+          </a:xfrm>
+          <a:prstGeom prst="rect">
+            <a:avLst/>
+          </a:prstGeom>
+          <a:noFill/>
+          <a:ln/>
+        </p:spPr>
+        <p:txBody>
+          <a:bodyPr wrap="square" lIns="0" tIns="0" rIns="0" bIns="0" rtlCol="0" anchor="t"/>
+          <a:lstStyle/>
+          <a:p>
+            <a:pPr algn="l" indent="0" marL="0">
+              <a:lnSpc>
+                <a:spcPts val="1680"/>
+              </a:lnSpc>
+              <a:spcBef>
+                <a:spcPts val="300"/>
+              </a:spcBef>
+              <a:spcAft>
+                <a:spcPts val="300"/>
+              </a:spcAft>
+              <a:buNone/>
+            </a:pPr>
+            <a:r>
+              <a:rPr lang="en-US" sz="1200" dirty="0">
+                <a:solidFill>
+                  <a:srgbClr val="2C2C2C"/>
+                </a:solidFill>
+                <a:latin typeface="Verdana" pitchFamily="34" charset="0"/>
+                <a:ea typeface="Verdana" pitchFamily="34" charset="-122"/>
+                <a:cs typeface="Verdana" pitchFamily="34" charset="-120"/>
+              </a:rPr>
+              <a:t>Class claps. Sticker.</a:t>
             </a:r>
             <a:endParaRPr lang="en-US" sz="1200" dirty="0"/>
           </a:p>
@@ -2925,7 +3012,7 @@
                 <a:ea typeface="Georgia" pitchFamily="34" charset="-122"/>
                 <a:cs typeface="Georgia" pitchFamily="34" charset="-120"/>
               </a:rPr>
-              <a:t>Homework</a:t>
+              <a:t>Closing (3 min)</a:t>
             </a:r>
             <a:endParaRPr lang="en-US" sz="1800" dirty="0"/>
           </a:p>
@@ -2939,8 +3026,8 @@
         </p:nvSpPr>
         <p:spPr>
           <a:xfrm>
-            <a:off x="406301" y="870942"/>
-            <a:ext cx="8498026" cy="213271"/>
+            <a:off x="634901" y="883593"/>
+            <a:ext cx="8102798" cy="769441"/>
           </a:xfrm>
           <a:prstGeom prst="rect">
             <a:avLst/>
@@ -2952,17 +3039,15 @@
           <a:bodyPr wrap="square" lIns="0" tIns="0" rIns="0" bIns="0" rtlCol="0" anchor="t"/>
           <a:lstStyle/>
           <a:p>
-            <a:pPr algn="l" indent="0" marL="0">
+            <a:pPr algn="l" marL="342900" indent="-342900">
               <a:lnSpc>
-                <a:spcPts val="1680"/>
+                <a:spcPts val="1620"/>
               </a:lnSpc>
-              <a:spcBef>
-                <a:spcPts val="300"/>
-              </a:spcBef>
               <a:spcAft>
                 <a:spcPts val="300"/>
               </a:spcAft>
-              <a:buNone/>
+              <a:buSzPct val="100000"/>
+              <a:buChar char="•"/>
             </a:pPr>
             <a:r>
               <a:rPr lang="en-US" sz="1200" dirty="0">
@@ -2973,7 +3058,259 @@
                 <a:ea typeface="Verdana" pitchFamily="34" charset="-122"/>
                 <a:cs typeface="Verdana" pitchFamily="34" charset="-120"/>
               </a:rPr>
-              <a:t>– None. Module done.</a:t>
+              <a:t>Stand in a circle.</a:t>
+            </a:r>
+            <a:endParaRPr lang="en-US" sz="1200" dirty="0"/>
+          </a:p>
+          <a:p>
+            <a:pPr algn="l" marL="342900" indent="-342900">
+              <a:lnSpc>
+                <a:spcPts val="1620"/>
+              </a:lnSpc>
+              <a:spcAft>
+                <a:spcPts val="300"/>
+              </a:spcAft>
+              <a:buSzPct val="100000"/>
+              <a:buChar char="•"/>
+            </a:pPr>
+            <a:r>
+              <a:rPr lang="en-US" sz="1200" dirty="0">
+                <a:solidFill>
+                  <a:srgbClr val="2C2C2C"/>
+                </a:solidFill>
+                <a:latin typeface="Verdana" pitchFamily="34" charset="0"/>
+                <a:ea typeface="Verdana" pitchFamily="34" charset="-122"/>
+                <a:cs typeface="Verdana" pitchFamily="34" charset="-120"/>
+              </a:rPr>
+              <a:t>Sing the song one final time.</a:t>
+            </a:r>
+            <a:endParaRPr lang="en-US" sz="1200" dirty="0"/>
+          </a:p>
+          <a:p>
+            <a:pPr algn="l" marL="342900" indent="-342900">
+              <a:lnSpc>
+                <a:spcPts val="1620"/>
+              </a:lnSpc>
+              <a:spcAft>
+                <a:spcPts val="300"/>
+              </a:spcAft>
+              <a:buSzPct val="100000"/>
+              <a:buChar char="•"/>
+            </a:pPr>
+            <a:r>
+              <a:rPr lang="en-US" sz="1200" i="1" dirty="0">
+                <a:solidFill>
+                  <a:srgbClr val="2C2C2C"/>
+                </a:solidFill>
+                <a:latin typeface="Verdana" pitchFamily="34" charset="0"/>
+                <a:ea typeface="Verdana" pitchFamily="34" charset="-122"/>
+                <a:cs typeface="Verdana" pitchFamily="34" charset="-120"/>
+              </a:rPr>
+              <a:t>"You all know the five gifts. They're with you for life."</a:t>
+            </a:r>
+            <a:endParaRPr lang="en-US" sz="1200" dirty="0"/>
+          </a:p>
+        </p:txBody>
+      </p:sp>
+      <p:sp>
+        <p:nvSpPr>
+          <p:cNvPr id="5" name="Text 3"/>
+          <p:cNvSpPr/>
+          <p:nvPr/>
+        </p:nvSpPr>
+        <p:spPr>
+          <a:xfrm>
+            <a:off x="406301" y="4434929"/>
+            <a:ext cx="8498026" cy="213271"/>
+          </a:xfrm>
+          <a:prstGeom prst="rect">
+            <a:avLst/>
+          </a:prstGeom>
+          <a:noFill/>
+          <a:ln/>
+        </p:spPr>
+        <p:txBody>
+          <a:bodyPr wrap="square" lIns="0" tIns="0" rIns="0" bIns="0" rtlCol="0" anchor="t"/>
+          <a:lstStyle/>
+          <a:p>
+            <a:pPr algn="l" indent="0" marL="0">
+              <a:lnSpc>
+                <a:spcPts val="1680"/>
+              </a:lnSpc>
+              <a:spcBef>
+                <a:spcPts val="300"/>
+              </a:spcBef>
+              <a:spcAft>
+                <a:spcPts val="300"/>
+              </a:spcAft>
+              <a:buNone/>
+            </a:pPr>
+            <a:r>
+              <a:rPr lang="en-US" sz="1200" dirty="0">
+                <a:solidFill>
+                  <a:srgbClr val="2C2C2C"/>
+                </a:solidFill>
+                <a:latin typeface="Verdana" pitchFamily="34" charset="0"/>
+                <a:ea typeface="Verdana" pitchFamily="34" charset="-122"/>
+                <a:cs typeface="Verdana" pitchFamily="34" charset="-120"/>
+              </a:rPr>
+              <a:t>Primary ·  · IKS Curriculum</a:t>
+            </a:r>
+            <a:endParaRPr lang="en-US" sz="1200" dirty="0"/>
+          </a:p>
+        </p:txBody>
+      </p:sp>
+    </p:spTree>
+  </p:cSld>
+  <p:clrMapOvr>
+    <a:masterClrMapping/>
+  </p:clrMapOvr>
+</p:sld>
+</file>
+
+<file path=ppt/slides/slide8.xml><?xml version="1.0" encoding="utf-8"?>
+<p:sld xmlns:a="http://schemas.openxmlformats.org/drawingml/2006/main" xmlns:r="http://schemas.openxmlformats.org/officeDocument/2006/relationships" xmlns:p="http://schemas.openxmlformats.org/presentationml/2006/main">
+  <p:cSld name="Slide 8">
+    <p:bg>
+      <p:bgPr>
+        <a:solidFill>
+          <a:srgbClr val="FAF7F2"/>
+        </a:solidFill>
+      </p:bgPr>
+    </p:bg>
+    <p:spTree>
+      <p:nvGrpSpPr>
+        <p:cNvPr id="1" name=""/>
+        <p:cNvGrpSpPr/>
+        <p:nvPr/>
+      </p:nvGrpSpPr>
+      <p:grpSpPr>
+        <a:xfrm>
+          <a:off x="0" y="0"/>
+          <a:ext cx="0" cy="0"/>
+          <a:chOff x="0" y="0"/>
+          <a:chExt cx="0" cy="0"/>
+        </a:xfrm>
+      </p:grpSpPr>
+      <p:sp>
+        <p:nvSpPr>
+          <p:cNvPr id="2" name="Text 0"/>
+          <p:cNvSpPr/>
+          <p:nvPr/>
+        </p:nvSpPr>
+        <p:spPr>
+          <a:xfrm>
+            <a:off x="0" y="0"/>
+            <a:ext cx="9144000" cy="101501"/>
+          </a:xfrm>
+          <a:prstGeom prst="rect">
+            <a:avLst/>
+          </a:prstGeom>
+          <a:solidFill>
+            <a:srgbClr val="87A96B"/>
+          </a:solidFill>
+          <a:ln/>
+        </p:spPr>
+        <p:txBody>
+          <a:bodyPr wrap="square" rtlCol="0" anchor="ctr"/>
+          <a:lstStyle/>
+          <a:p>
+            <a:pPr indent="0" marL="0">
+              <a:buNone/>
+            </a:pPr>
+            <a:endParaRPr lang="en-US" dirty="0"/>
+          </a:p>
+        </p:txBody>
+      </p:sp>
+      <p:sp>
+        <p:nvSpPr>
+          <p:cNvPr id="3" name="Text 1"/>
+          <p:cNvSpPr/>
+          <p:nvPr/>
+        </p:nvSpPr>
+        <p:spPr>
+          <a:xfrm>
+            <a:off x="406301" y="457051"/>
+            <a:ext cx="8498026" cy="274290"/>
+          </a:xfrm>
+          <a:prstGeom prst="rect">
+            <a:avLst/>
+          </a:prstGeom>
+          <a:noFill/>
+          <a:ln/>
+        </p:spPr>
+        <p:txBody>
+          <a:bodyPr wrap="square" lIns="0" tIns="0" rIns="0" bIns="0" rtlCol="0" anchor="t"/>
+          <a:lstStyle/>
+          <a:p>
+            <a:pPr algn="l" indent="0" marL="0">
+              <a:lnSpc>
+                <a:spcPts val="2160"/>
+              </a:lnSpc>
+              <a:spcBef>
+                <a:spcPts val="600"/>
+              </a:spcBef>
+              <a:spcAft>
+                <a:spcPts val="800"/>
+              </a:spcAft>
+              <a:buNone/>
+            </a:pPr>
+            <a:r>
+              <a:rPr lang="en-US" sz="1800" b="1" dirty="0">
+                <a:solidFill>
+                  <a:srgbClr val="E07A5F"/>
+                </a:solidFill>
+                <a:latin typeface="Georgia" pitchFamily="34" charset="0"/>
+                <a:ea typeface="Georgia" pitchFamily="34" charset="-122"/>
+                <a:cs typeface="Georgia" pitchFamily="34" charset="-120"/>
+              </a:rPr>
+              <a:t>Homework</a:t>
+            </a:r>
+            <a:endParaRPr lang="en-US" sz="1800" dirty="0"/>
+          </a:p>
+        </p:txBody>
+      </p:sp>
+      <p:sp>
+        <p:nvSpPr>
+          <p:cNvPr id="4" name="Text 2"/>
+          <p:cNvSpPr/>
+          <p:nvPr/>
+        </p:nvSpPr>
+        <p:spPr>
+          <a:xfrm>
+            <a:off x="634901" y="883593"/>
+            <a:ext cx="8102798" cy="281880"/>
+          </a:xfrm>
+          <a:prstGeom prst="rect">
+            <a:avLst/>
+          </a:prstGeom>
+          <a:noFill/>
+          <a:ln/>
+        </p:spPr>
+        <p:txBody>
+          <a:bodyPr wrap="square" lIns="0" tIns="0" rIns="0" bIns="0" rtlCol="0" anchor="t"/>
+          <a:lstStyle/>
+          <a:p>
+            <a:pPr algn="l" marL="342900" indent="-342900">
+              <a:lnSpc>
+                <a:spcPts val="1620"/>
+              </a:lnSpc>
+              <a:spcAft>
+                <a:spcPts val="300"/>
+              </a:spcAft>
+              <a:buSzPct val="100000"/>
+              <a:buChar char="•"/>
+            </a:pPr>
+            <a:r>
+              <a:rPr lang="en-US" sz="1200" dirty="0">
+                <a:solidFill>
+                  <a:srgbClr val="2C2C2C"/>
+                </a:solidFill>
+                <a:latin typeface="Verdana" pitchFamily="34" charset="0"/>
+                <a:ea typeface="Verdana" pitchFamily="34" charset="-122"/>
+                <a:cs typeface="Verdana" pitchFamily="34" charset="-120"/>
+              </a:rPr>
+              <a:t>None. Module done.</a:t>
             </a:r>
             <a:endParaRPr lang="en-US" sz="1200" dirty="0"/>
           </a:p>
